--- a/docs/example5_walkthrough.pptx
+++ b/docs/example5_walkthrough.pptx
@@ -9,7 +9,7 @@
     <p:sldId id="257" r:id="rId8"/>
     <p:sldId id="258" r:id="rId9"/>
   </p:sldIdLst>
-  <p:sldSz cx="9144000" cy="6858000" type="screen4x3"/>
+  <p:sldSz cx="12192000" cy="6858000" type="screen4x3"/>
   <p:notesSz cx="6858000" cy="9144000"/>
   <p:defaultTextStyle>
     <a:defPPr>
@@ -3099,7 +3099,7 @@
         <p:spPr>
           <a:xfrm>
             <a:off x="0" y="0"/>
-            <a:ext cx="9144000" cy="6858000"/>
+            <a:ext cx="12192000" cy="6858000"/>
           </a:xfrm>
           <a:prstGeom prst="rect">
             <a:avLst/>
@@ -3141,7 +3141,7 @@
         </p:nvSpPr>
         <p:spPr>
           <a:xfrm>
-            <a:off x="7543800" y="0"/>
+            <a:off x="10591800" y="0"/>
             <a:ext cx="1600200" cy="6858000"/>
           </a:xfrm>
           <a:prstGeom prst="rect">
@@ -3186,7 +3186,7 @@
         </p:nvSpPr>
         <p:spPr>
           <a:xfrm rot="16200000">
-            <a:off x="7616952" y="274320"/>
+            <a:off x="10664952" y="274320"/>
             <a:ext cx="1453896" cy="6309360"/>
           </a:xfrm>
           <a:prstGeom prst="rect">
@@ -3223,7 +3223,7 @@
         <p:spPr>
           <a:xfrm>
             <a:off x="731520" y="502920"/>
-            <a:ext cx="6446520" cy="1051560"/>
+            <a:ext cx="9494520" cy="1051560"/>
           </a:xfrm>
           <a:prstGeom prst="rect">
             <a:avLst/>
@@ -3300,7 +3300,7 @@
         </p:blipFill>
         <p:spPr>
           <a:xfrm>
-            <a:off x="2606213" y="1691640"/>
+            <a:off x="4130213" y="1691640"/>
             <a:ext cx="2331373" cy="4846320"/>
           </a:xfrm>
           <a:prstGeom prst="rect">
@@ -3335,7 +3335,7 @@
         <p:spPr>
           <a:xfrm>
             <a:off x="0" y="0"/>
-            <a:ext cx="9144000" cy="6858000"/>
+            <a:ext cx="12192000" cy="6858000"/>
           </a:xfrm>
           <a:prstGeom prst="rect">
             <a:avLst/>
@@ -3378,7 +3378,7 @@
         <p:spPr>
           <a:xfrm>
             <a:off x="164592" y="109728"/>
-            <a:ext cx="8814816" cy="6638544"/>
+            <a:ext cx="11862816" cy="6638544"/>
           </a:xfrm>
           <a:prstGeom prst="rect">
             <a:avLst/>
@@ -4963,7 +4963,7 @@
         <p:spPr>
           <a:xfrm>
             <a:off x="0" y="0"/>
-            <a:ext cx="9144000" cy="6858000"/>
+            <a:ext cx="12192000" cy="6858000"/>
           </a:xfrm>
           <a:prstGeom prst="rect">
             <a:avLst/>
@@ -5006,7 +5006,7 @@
         <p:spPr>
           <a:xfrm>
             <a:off x="164592" y="109728"/>
-            <a:ext cx="8814816" cy="6638544"/>
+            <a:ext cx="11862816" cy="6638544"/>
           </a:xfrm>
           <a:prstGeom prst="rect">
             <a:avLst/>
